--- a/pitch/HoldOn-demo-walkthrough.pptx
+++ b/pitch/HoldOn-demo-walkthrough.pptx
@@ -116,13 +116,13 @@
   <p:extLst>
     <p:ext uri="{521415D9-36F7-43E2-AB2F-B90AF26B5E84}">
       <p14:sectionLst xmlns:p14="http://schemas.microsoft.com/office/powerpoint/2010/main">
-        <p14:section name="Intro" id="{c9a9b9d1-0c19-4f55-bc3e-0842a53ec02c}">
+        <p14:section name="Intro" id="{d0cd1817-9dd2-1b3b-8aaa-79f2c2b74588}">
           <p14:sldIdLst>
             <p14:sldId id="256"/>
             <p14:sldId id="257"/>
           </p14:sldIdLst>
         </p14:section>
-        <p14:section name="Demo steps" id="{2ca2ab73-b7a1-1e57-907a-bec66e9af04f}">
+        <p14:section name="Demo steps" id="{5c18514f-4f4c-38d4-9167-5ae18eb7a148}">
           <p14:sldIdLst>
             <p14:sldId id="258"/>
             <p14:sldId id="259"/>
@@ -133,7 +133,7 @@
             <p14:sldId id="264"/>
           </p14:sldIdLst>
         </p14:section>
-        <p14:section name="Recap" id="{799e2d54-911f-ff89-71a2-a6f91ce61e4a}">
+        <p14:section name="Recap" id="{16edfe5c-e6d8-530a-cfc9-1be459660cb2}">
           <p14:sldIdLst>
             <p14:sldId id="265"/>
           </p14:sldIdLst>
@@ -2079,8 +2079,11 @@
                   <a:schemeClr val="bg2"/>
                 </a:solidFill>
               </a:rPr>
-              <a:t>How HoldOn stops a tech-support scam, step by step. </a:t>
-            </a:r>
+              <a:t>How HoldOn stops a tech-support scam, step by step.</a:t>
+            </a:r>
+            <a:endParaRPr lang="en-US" sz="1800" dirty="0"/>
+          </a:p>
+          <a:p>
             <a:pPr indent="0" marL="0">
               <a:buNone/>
             </a:pPr>
@@ -2216,7 +2219,21 @@
                   <a:schemeClr val="bg1"/>
                 </a:solidFill>
               </a:rPr>
-              <a:t>She can't call for help. HoldOn does.</a:t>
+              <a:t>She can't call for help.</a:t>
+            </a:r>
+            <a:endParaRPr lang="en-US" sz="4000" dirty="0"/>
+          </a:p>
+          <a:p>
+            <a:pPr algn="l" indent="0" marL="0">
+              <a:buNone/>
+            </a:pPr>
+            <a:r>
+              <a:rPr lang="en-US" sz="4000" b="1" dirty="0">
+                <a:solidFill>
+                  <a:schemeClr val="accent1"/>
+                </a:solidFill>
+              </a:rPr>
+              <a:t>HoldOn does.</a:t>
             </a:r>
             <a:endParaRPr lang="en-US" sz="4000" dirty="0"/>
           </a:p>
@@ -3760,7 +3777,7 @@
           <a:bodyPr wrap="square" lIns="0" tIns="0" rIns="0" bIns="0" rtlCol="0" anchor="t"/>
           <a:lstStyle/>
           <a:p>
-            <a:pPr marL="342900" indent="-342900">
+            <a:pPr marL="190500" indent="-190500">
               <a:spcAft>
                 <a:spcPts val="800"/>
               </a:spcAft>
@@ -3778,7 +3795,7 @@
             <a:endParaRPr lang="en-US" sz="1400" dirty="0"/>
           </a:p>
           <a:p>
-            <a:pPr marL="342900" indent="-342900">
+            <a:pPr marL="190500" indent="-190500">
               <a:spcAft>
                 <a:spcPts val="800"/>
               </a:spcAft>
@@ -3796,7 +3813,7 @@
             <a:endParaRPr lang="en-US" sz="1400" dirty="0"/>
           </a:p>
           <a:p>
-            <a:pPr marL="342900" indent="-342900">
+            <a:pPr marL="190500" indent="-190500">
               <a:spcAft>
                 <a:spcPts val="800"/>
               </a:spcAft>
@@ -3886,12 +3903,12 @@
         </p:nvSpPr>
         <p:spPr>
           <a:xfrm>
-            <a:off x="3877056" y="2007220"/>
-            <a:ext cx="2350008" cy="1746280"/>
+            <a:off x="4533375" y="1133856"/>
+            <a:ext cx="3551970" cy="2624328"/>
           </a:xfrm>
           <a:prstGeom prst="roundRect">
             <a:avLst>
-              <a:gd name="adj" fmla="val 4189"/>
+              <a:gd name="adj" fmla="val 2787"/>
             </a:avLst>
           </a:prstGeom>
           <a:solidFill>
@@ -3921,8 +3938,8 @@
         </p:blipFill>
         <p:spPr>
           <a:xfrm>
-            <a:off x="3931920" y="2062084"/>
-            <a:ext cx="2240280" cy="1636552"/>
+            <a:off x="4588239" y="1188720"/>
+            <a:ext cx="3442242" cy="2514600"/>
           </a:xfrm>
           <a:prstGeom prst="rect">
             <a:avLst/>
@@ -3937,12 +3954,12 @@
         </p:nvSpPr>
         <p:spPr>
           <a:xfrm>
-            <a:off x="6300216" y="2373252"/>
-            <a:ext cx="2441448" cy="1014215"/>
+            <a:off x="3907536" y="3877056"/>
+            <a:ext cx="4803648" cy="749808"/>
           </a:xfrm>
           <a:prstGeom prst="roundRect">
             <a:avLst>
-              <a:gd name="adj" fmla="val 7213"/>
+              <a:gd name="adj" fmla="val 9756"/>
             </a:avLst>
           </a:prstGeom>
           <a:solidFill>
@@ -3972,8 +3989,8 @@
         </p:blipFill>
         <p:spPr>
           <a:xfrm>
-            <a:off x="6355080" y="2428116"/>
-            <a:ext cx="2331720" cy="904487"/>
+            <a:off x="3962400" y="3931920"/>
+            <a:ext cx="4693920" cy="640080"/>
           </a:xfrm>
           <a:prstGeom prst="rect">
             <a:avLst/>
@@ -4206,7 +4223,7 @@
           <a:bodyPr wrap="square" lIns="0" tIns="0" rIns="0" bIns="0" rtlCol="0" anchor="t"/>
           <a:lstStyle/>
           <a:p>
-            <a:pPr marL="342900" indent="-342900">
+            <a:pPr marL="190500" indent="-190500">
               <a:spcAft>
                 <a:spcPts val="800"/>
               </a:spcAft>
@@ -4224,7 +4241,7 @@
             <a:endParaRPr lang="en-US" sz="1400" dirty="0"/>
           </a:p>
           <a:p>
-            <a:pPr marL="342900" indent="-342900">
+            <a:pPr marL="190500" indent="-190500">
               <a:spcAft>
                 <a:spcPts val="800"/>
               </a:spcAft>
@@ -4242,7 +4259,7 @@
             <a:endParaRPr lang="en-US" sz="1400" dirty="0"/>
           </a:p>
           <a:p>
-            <a:pPr marL="342900" indent="-342900">
+            <a:pPr marL="190500" indent="-190500">
               <a:spcAft>
                 <a:spcPts val="800"/>
               </a:spcAft>
@@ -4601,7 +4618,7 @@
           <a:bodyPr wrap="square" lIns="0" tIns="0" rIns="0" bIns="0" rtlCol="0" anchor="t"/>
           <a:lstStyle/>
           <a:p>
-            <a:pPr marL="342900" indent="-342900">
+            <a:pPr marL="190500" indent="-190500">
               <a:spcAft>
                 <a:spcPts val="800"/>
               </a:spcAft>
@@ -4619,7 +4636,7 @@
             <a:endParaRPr lang="en-US" sz="1400" dirty="0"/>
           </a:p>
           <a:p>
-            <a:pPr marL="342900" indent="-342900">
+            <a:pPr marL="190500" indent="-190500">
               <a:spcAft>
                 <a:spcPts val="800"/>
               </a:spcAft>
@@ -4637,7 +4654,7 @@
             <a:endParaRPr lang="en-US" sz="1400" dirty="0"/>
           </a:p>
           <a:p>
-            <a:pPr marL="342900" indent="-342900">
+            <a:pPr marL="190500" indent="-190500">
               <a:spcAft>
                 <a:spcPts val="800"/>
               </a:spcAft>
@@ -4996,7 +5013,7 @@
           <a:bodyPr wrap="square" lIns="0" tIns="0" rIns="0" bIns="0" rtlCol="0" anchor="t"/>
           <a:lstStyle/>
           <a:p>
-            <a:pPr marL="342900" indent="-342900">
+            <a:pPr marL="190500" indent="-190500">
               <a:spcAft>
                 <a:spcPts val="800"/>
               </a:spcAft>
@@ -5014,7 +5031,7 @@
             <a:endParaRPr lang="en-US" sz="1400" dirty="0"/>
           </a:p>
           <a:p>
-            <a:pPr marL="342900" indent="-342900">
+            <a:pPr marL="190500" indent="-190500">
               <a:spcAft>
                 <a:spcPts val="800"/>
               </a:spcAft>
@@ -5032,7 +5049,7 @@
             <a:endParaRPr lang="en-US" sz="1400" dirty="0"/>
           </a:p>
           <a:p>
-            <a:pPr marL="342900" indent="-342900">
+            <a:pPr marL="190500" indent="-190500">
               <a:spcAft>
                 <a:spcPts val="800"/>
               </a:spcAft>
@@ -5122,12 +5139,12 @@
         </p:nvSpPr>
         <p:spPr>
           <a:xfrm>
-            <a:off x="3877056" y="1935021"/>
-            <a:ext cx="4864608" cy="1890678"/>
+            <a:off x="3877056" y="2012800"/>
+            <a:ext cx="4864608" cy="1735121"/>
           </a:xfrm>
           <a:prstGeom prst="roundRect">
             <a:avLst>
-              <a:gd name="adj" fmla="val 3869"/>
+              <a:gd name="adj" fmla="val 4216"/>
             </a:avLst>
           </a:prstGeom>
           <a:solidFill>
@@ -5157,8 +5174,8 @@
         </p:blipFill>
         <p:spPr>
           <a:xfrm>
-            <a:off x="3931920" y="1989885"/>
-            <a:ext cx="4754880" cy="1780950"/>
+            <a:off x="3931920" y="2067664"/>
+            <a:ext cx="4754880" cy="1625393"/>
           </a:xfrm>
           <a:prstGeom prst="rect">
             <a:avLst/>
@@ -5391,7 +5408,7 @@
           <a:bodyPr wrap="square" lIns="0" tIns="0" rIns="0" bIns="0" rtlCol="0" anchor="t"/>
           <a:lstStyle/>
           <a:p>
-            <a:pPr marL="342900" indent="-342900">
+            <a:pPr marL="190500" indent="-190500">
               <a:spcAft>
                 <a:spcPts val="800"/>
               </a:spcAft>
@@ -5409,7 +5426,7 @@
             <a:endParaRPr lang="en-US" sz="1400" dirty="0"/>
           </a:p>
           <a:p>
-            <a:pPr marL="342900" indent="-342900">
+            <a:pPr marL="190500" indent="-190500">
               <a:spcAft>
                 <a:spcPts val="800"/>
               </a:spcAft>
@@ -5427,7 +5444,7 @@
             <a:endParaRPr lang="en-US" sz="1400" dirty="0"/>
           </a:p>
           <a:p>
-            <a:pPr marL="342900" indent="-342900">
+            <a:pPr marL="190500" indent="-190500">
               <a:spcAft>
                 <a:spcPts val="800"/>
               </a:spcAft>
@@ -5517,12 +5534,12 @@
         </p:nvSpPr>
         <p:spPr>
           <a:xfrm>
-            <a:off x="3963924" y="1133856"/>
-            <a:ext cx="4690872" cy="3493008"/>
+            <a:off x="3877056" y="2324229"/>
+            <a:ext cx="4864608" cy="1112263"/>
           </a:xfrm>
           <a:prstGeom prst="roundRect">
             <a:avLst>
-              <a:gd name="adj" fmla="val 2094"/>
+              <a:gd name="adj" fmla="val 6577"/>
             </a:avLst>
           </a:prstGeom>
           <a:solidFill>
@@ -5552,8 +5569,8 @@
         </p:blipFill>
         <p:spPr>
           <a:xfrm>
-            <a:off x="4018788" y="1188720"/>
-            <a:ext cx="4581144" cy="3383280"/>
+            <a:off x="3931920" y="2379093"/>
+            <a:ext cx="4754880" cy="1002535"/>
           </a:xfrm>
           <a:prstGeom prst="rect">
             <a:avLst/>
@@ -5731,14 +5748,14 @@
       </p:sp>
       <p:sp>
         <p:nvSpPr>
-          <p:cNvPr id="5" name="Who"/>
+          <p:cNvPr id="5" name="Telegram label"/>
           <p:cNvSpPr txBox="1"/>
           <p:nvPr/>
         </p:nvSpPr>
         <p:spPr>
           <a:xfrm>
             <a:off x="457200" y="1234440"/>
-            <a:ext cx="3108960" cy="320040"/>
+            <a:ext cx="3291840" cy="274320"/>
           </a:xfrm>
           <a:prstGeom prst="rect">
             <a:avLst/>
@@ -5754,107 +5771,31 @@
               <a:buNone/>
             </a:pPr>
             <a:r>
-              <a:rPr lang="en-US" sz="1200" b="1" spc="200" kern="0" dirty="0">
+              <a:rPr lang="en-US" sz="1100" b="1" spc="200" kern="0" dirty="0">
                 <a:solidFill>
                   <a:schemeClr val="accent3"/>
                 </a:solidFill>
               </a:rPr>
-              <a:t>SARAH'S DASHBOARD</a:t>
-            </a:r>
-            <a:endParaRPr lang="en-US" sz="1200" dirty="0"/>
-          </a:p>
-        </p:txBody>
-      </p:sp>
-      <p:sp>
-        <p:nvSpPr>
-          <p:cNvPr id="6" name="What happens"/>
-          <p:cNvSpPr txBox="1"/>
-          <p:nvPr/>
-        </p:nvSpPr>
-        <p:spPr>
-          <a:xfrm>
-            <a:off x="457200" y="1645920"/>
-            <a:ext cx="3108960" cy="1920240"/>
-          </a:xfrm>
-          <a:prstGeom prst="rect">
-            <a:avLst/>
-          </a:prstGeom>
-          <a:noFill/>
-          <a:ln/>
-        </p:spPr>
-        <p:txBody>
-          <a:bodyPr wrap="square" lIns="0" tIns="0" rIns="0" bIns="0" rtlCol="0" anchor="t"/>
-          <a:lstStyle/>
-          <a:p>
-            <a:pPr marL="342900" indent="-342900">
-              <a:spcAft>
-                <a:spcPts val="800"/>
-              </a:spcAft>
-              <a:buSzPct val="100000"/>
-              <a:buChar char="•"/>
-            </a:pPr>
-            <a:r>
-              <a:rPr lang="en-US" sz="1400" dirty="0">
-                <a:solidFill>
-                  <a:schemeClr val="bg1"/>
-                </a:solidFill>
-              </a:rPr>
-              <a:t>Alerts, scams stopped, false alarms</a:t>
-            </a:r>
-            <a:endParaRPr lang="en-US" sz="1400" dirty="0"/>
-          </a:p>
-          <a:p>
-            <a:pPr marL="342900" indent="-342900">
-              <a:spcAft>
-                <a:spcPts val="800"/>
-              </a:spcAft>
-              <a:buSzPct val="100000"/>
-              <a:buChar char="•"/>
-            </a:pPr>
-            <a:r>
-              <a:rPr lang="en-US" sz="1400" dirty="0">
-                <a:solidFill>
-                  <a:schemeClr val="bg1"/>
-                </a:solidFill>
-              </a:rPr>
-              <a:t>Precision: answered alerts that were real scams</a:t>
-            </a:r>
-            <a:endParaRPr lang="en-US" sz="1400" dirty="0"/>
-          </a:p>
-          <a:p>
-            <a:pPr marL="342900" indent="-342900">
-              <a:spcAft>
-                <a:spcPts val="800"/>
-              </a:spcAft>
-              <a:buSzPct val="100000"/>
-              <a:buChar char="•"/>
-            </a:pPr>
-            <a:r>
-              <a:rPr lang="en-US" sz="1400" dirty="0">
-                <a:solidFill>
-                  <a:schemeClr val="bg1"/>
-                </a:solidFill>
-              </a:rPr>
-              <a:t>Live counts from our test runs today</a:t>
-            </a:r>
-            <a:endParaRPr lang="en-US" sz="1400" dirty="0"/>
-          </a:p>
-        </p:txBody>
-      </p:sp>
-      <p:sp>
-        <p:nvSpPr>
-          <p:cNvPr id="7" name="Dashboard stats frame"/>
+              <a:t>ANSWERED IN TELEGRAM</a:t>
+            </a:r>
+            <a:endParaRPr lang="en-US" sz="1100" dirty="0"/>
+          </a:p>
+        </p:txBody>
+      </p:sp>
+      <p:sp>
+        <p:nvSpPr>
+          <p:cNvPr id="6" name="Telegram alert history with logged outcomes frame"/>
           <p:cNvSpPr/>
           <p:nvPr/>
         </p:nvSpPr>
         <p:spPr>
           <a:xfrm>
-            <a:off x="3877056" y="1700784"/>
-            <a:ext cx="4864608" cy="1536192"/>
+            <a:off x="450914" y="1545336"/>
+            <a:ext cx="3304413" cy="3081528"/>
           </a:xfrm>
           <a:prstGeom prst="roundRect">
             <a:avLst>
-              <a:gd name="adj" fmla="val 4762"/>
+              <a:gd name="adj" fmla="val 2374"/>
             </a:avLst>
           </a:prstGeom>
           <a:solidFill>
@@ -5870,7 +5811,7 @@
       </p:sp>
       <p:pic>
         <p:nvPicPr>
-          <p:cNvPr id="8" name="Dashboard stats" descr="Dashboard stats">    </p:cNvPr>
+          <p:cNvPr id="7" name="Telegram alert history with logged outcomes" descr="Telegram alert history with logged outcomes">    </p:cNvPr>
           <p:cNvPicPr>
             <a:picLocks noChangeAspect="1"/>
           </p:cNvPicPr>
@@ -5884,8 +5825,8 @@
         </p:blipFill>
         <p:spPr>
           <a:xfrm>
-            <a:off x="3931920" y="1755648"/>
-            <a:ext cx="4754880" cy="1426464"/>
+            <a:off x="505778" y="1600200"/>
+            <a:ext cx="3194685" cy="2971800"/>
           </a:xfrm>
           <a:prstGeom prst="rect">
             <a:avLst/>
@@ -5894,14 +5835,14 @@
       </p:pic>
       <p:sp>
         <p:nvSpPr>
-          <p:cNvPr id="9" name="Dashboard caption"/>
+          <p:cNvPr id="8" name="Dashboard label"/>
           <p:cNvSpPr txBox="1"/>
           <p:nvPr/>
         </p:nvSpPr>
         <p:spPr>
           <a:xfrm>
-            <a:off x="3931920" y="3749040"/>
-            <a:ext cx="4754880" cy="548640"/>
+            <a:off x="4114800" y="1234440"/>
+            <a:ext cx="4572000" cy="274320"/>
           </a:xfrm>
           <a:prstGeom prst="rect">
             <a:avLst/>
@@ -5917,14 +5858,120 @@
               <a:buNone/>
             </a:pPr>
             <a:r>
-              <a:rPr lang="en-US" sz="1200" i="1" dirty="0">
-                <a:solidFill>
-                  <a:schemeClr val="bg2"/>
-                </a:solidFill>
-              </a:rPr>
-              <a:t>False alarms are expected in testing: we triggered alerts on purpose to tune detection.</a:t>
-            </a:r>
-            <a:endParaRPr lang="en-US" sz="1200" dirty="0"/>
+              <a:rPr lang="en-US" sz="1100" b="1" spc="200" kern="0" dirty="0">
+                <a:solidFill>
+                  <a:schemeClr val="accent3"/>
+                </a:solidFill>
+              </a:rPr>
+              <a:t>ROLLED UP ON SARAH'S DASHBOARD</a:t>
+            </a:r>
+            <a:endParaRPr lang="en-US" sz="1100" dirty="0"/>
+          </a:p>
+        </p:txBody>
+      </p:sp>
+      <p:sp>
+        <p:nvSpPr>
+          <p:cNvPr id="9" name="Dashboard stats frame"/>
+          <p:cNvSpPr/>
+          <p:nvPr/>
+        </p:nvSpPr>
+        <p:spPr>
+          <a:xfrm>
+            <a:off x="4059936" y="1545336"/>
+            <a:ext cx="4681728" cy="1481328"/>
+          </a:xfrm>
+          <a:prstGeom prst="roundRect">
+            <a:avLst>
+              <a:gd name="adj" fmla="val 4938"/>
+            </a:avLst>
+          </a:prstGeom>
+          <a:solidFill>
+            <a:schemeClr val="tx2"/>
+          </a:solidFill>
+          <a:ln w="12700">
+            <a:solidFill>
+              <a:schemeClr val="accent4"/>
+            </a:solidFill>
+            <a:prstDash val="solid"/>
+          </a:ln>
+        </p:spPr>
+      </p:sp>
+      <p:pic>
+        <p:nvPicPr>
+          <p:cNvPr id="10" name="Dashboard stats" descr="Dashboard stats">    </p:cNvPr>
+          <p:cNvPicPr>
+            <a:picLocks noChangeAspect="1"/>
+          </p:cNvPicPr>
+          <p:nvPr/>
+        </p:nvPicPr>
+        <p:blipFill>
+          <a:blip r:embed="rId2"/>
+          <a:stretch>
+            <a:fillRect/>
+          </a:stretch>
+        </p:blipFill>
+        <p:spPr>
+          <a:xfrm>
+            <a:off x="4114800" y="1600200"/>
+            <a:ext cx="4572000" cy="1371600"/>
+          </a:xfrm>
+          <a:prstGeom prst="rect">
+            <a:avLst/>
+          </a:prstGeom>
+        </p:spPr>
+      </p:pic>
+      <p:sp>
+        <p:nvSpPr>
+          <p:cNvPr id="11" name="Dashboard notes"/>
+          <p:cNvSpPr txBox="1"/>
+          <p:nvPr/>
+        </p:nvSpPr>
+        <p:spPr>
+          <a:xfrm>
+            <a:off x="4114800" y="3200400"/>
+            <a:ext cx="4572000" cy="1280160"/>
+          </a:xfrm>
+          <a:prstGeom prst="rect">
+            <a:avLst/>
+          </a:prstGeom>
+          <a:noFill/>
+          <a:ln/>
+        </p:spPr>
+        <p:txBody>
+          <a:bodyPr wrap="square" lIns="0" tIns="0" rIns="0" bIns="0" rtlCol="0" anchor="t"/>
+          <a:lstStyle/>
+          <a:p>
+            <a:pPr marL="190500" indent="-190500">
+              <a:spcAft>
+                <a:spcPts val="600"/>
+              </a:spcAft>
+              <a:buSzPct val="100000"/>
+              <a:buChar char="•"/>
+            </a:pPr>
+            <a:r>
+              <a:rPr lang="en-US" sz="1400" dirty="0">
+                <a:solidFill>
+                  <a:schemeClr val="bg1"/>
+                </a:solidFill>
+              </a:rPr>
+              <a:t>Scams stopped, false alarms and precision, counted live</a:t>
+            </a:r>
+            <a:endParaRPr lang="en-US" sz="1400" dirty="0"/>
+          </a:p>
+          <a:p>
+            <a:pPr marL="190500" indent="-190500">
+              <a:buSzPct val="100000"/>
+              <a:buChar char="•"/>
+            </a:pPr>
+            <a:r>
+              <a:rPr lang="en-US" sz="1400" dirty="0">
+                <a:solidFill>
+                  <a:schemeClr val="bg1"/>
+                </a:solidFill>
+              </a:rPr>
+              <a:t>Real counts from our test runs today: false alarms were triggered on purpose to tune detection</a:t>
+            </a:r>
+            <a:endParaRPr lang="en-US" sz="1400" dirty="0"/>
           </a:p>
         </p:txBody>
       </p:sp>
@@ -6154,7 +6201,7 @@
           <a:bodyPr wrap="square" lIns="0" tIns="0" rIns="0" bIns="0" rtlCol="0" anchor="t"/>
           <a:lstStyle/>
           <a:p>
-            <a:pPr marL="342900" indent="-342900">
+            <a:pPr marL="190500" indent="-190500">
               <a:spcAft>
                 <a:spcPts val="800"/>
               </a:spcAft>
@@ -6172,7 +6219,7 @@
             <a:endParaRPr lang="en-US" sz="1400" dirty="0"/>
           </a:p>
           <a:p>
-            <a:pPr marL="342900" indent="-342900">
+            <a:pPr marL="190500" indent="-190500">
               <a:spcAft>
                 <a:spcPts val="800"/>
               </a:spcAft>
@@ -6190,7 +6237,7 @@
             <a:endParaRPr lang="en-US" sz="1400" dirty="0"/>
           </a:p>
           <a:p>
-            <a:pPr marL="342900" indent="-342900">
+            <a:pPr marL="190500" indent="-190500">
               <a:spcAft>
                 <a:spcPts val="800"/>
               </a:spcAft>

--- a/pitch/HoldOn-demo-walkthrough.pptx
+++ b/pitch/HoldOn-demo-walkthrough.pptx
@@ -116,13 +116,13 @@
   <p:extLst>
     <p:ext uri="{521415D9-36F7-43E2-AB2F-B90AF26B5E84}">
       <p14:sectionLst xmlns:p14="http://schemas.microsoft.com/office/powerpoint/2010/main">
-        <p14:section name="Intro" id="{d0cd1817-9dd2-1b3b-8aaa-79f2c2b74588}">
+        <p14:section name="Intro" id="{71b5d902-9e5c-c664-2b68-faf312e24df2}">
           <p14:sldIdLst>
             <p14:sldId id="256"/>
             <p14:sldId id="257"/>
           </p14:sldIdLst>
         </p14:section>
-        <p14:section name="Demo steps" id="{5c18514f-4f4c-38d4-9167-5ae18eb7a148}">
+        <p14:section name="Demo steps" id="{86d58b6f-09c1-c57c-5491-83b89dfcb10f}">
           <p14:sldIdLst>
             <p14:sldId id="258"/>
             <p14:sldId id="259"/>
@@ -133,7 +133,7 @@
             <p14:sldId id="264"/>
           </p14:sldIdLst>
         </p14:section>
-        <p14:section name="Recap" id="{16edfe5c-e6d8-530a-cfc9-1be459660cb2}">
+        <p14:section name="Recap" id="{588bd603-78f3-c850-b114-c981e77a7054}">
           <p14:sldIdLst>
             <p14:sldId id="265"/>
           </p14:sldIdLst>
@@ -2041,7 +2041,7 @@
                   <a:schemeClr val="bg1"/>
                 </a:solidFill>
               </a:rPr>
-              <a:t>HoldOn: demo walkthrough</a:t>
+              <a:t>HoldOn: how it works</a:t>
             </a:r>
             <a:endParaRPr lang="en-US" sz="4000" dirty="0"/>
           </a:p>
@@ -2079,7 +2079,7 @@
                   <a:schemeClr val="bg2"/>
                 </a:solidFill>
               </a:rPr>
-              <a:t>How HoldOn stops a tech-support scam, step by step.</a:t>
+              <a:t>How HoldOn stops a computer scam, step by step.</a:t>
             </a:r>
             <a:endParaRPr lang="en-US" sz="1800" dirty="0"/>
           </a:p>
@@ -2271,7 +2271,7 @@
                   <a:schemeClr val="bg2"/>
                 </a:solidFill>
               </a:rPr>
-              <a:t>Spots the scam moment → Mom sees STOP → Sarah's phone buzzes → Sarah calls → Scam stopped</a:t>
+              <a:t>HoldOn spots the trick → Mom sees STOP → Sarah's phone buzzes → Sarah calls → Scam stopped</a:t>
             </a:r>
             <a:endParaRPr lang="en-US" sz="1800" dirty="0"/>
           </a:p>
@@ -2307,7 +2307,7 @@
                   <a:schemeClr val="bg2"/>
                 </a:solidFill>
               </a:rPr>
-              <a:t>Built in one afternoon: Chrome extension · Next.js · Claude via RouterPlus · Telegram Bot API</a:t>
+              <a:t>Built in one afternoon with a browser add-on, a small server, AI (Claude) and Telegram</a:t>
             </a:r>
             <a:endParaRPr lang="en-US" sz="1300" dirty="0"/>
           </a:p>
@@ -2370,7 +2370,7 @@
                   <a:schemeClr val="bg1"/>
                 </a:solidFill>
               </a:rPr>
-              <a:t>The setup</a:t>
+              <a:t>Who's who</a:t>
             </a:r>
             <a:endParaRPr lang="en-US" sz="2800" dirty="0"/>
           </a:p>
@@ -2530,7 +2530,7 @@
                   <a:schemeClr val="bg1"/>
                 </a:solidFill>
               </a:rPr>
-              <a:t>Mom's laptop: Chrome with the HoldOn extension</a:t>
+              <a:t>Mom. HoldOn is added to her laptop's web browser.</a:t>
             </a:r>
             <a:endParaRPr lang="en-US" sz="1300" dirty="0"/>
           </a:p>
@@ -2629,7 +2629,7 @@
                   <a:schemeClr val="bg1"/>
                 </a:solidFill>
               </a:rPr>
-              <a:t>Her daughter, far away: gets alerts on Telegram</a:t>
+              <a:t>Her daughter. Lives far away. Gets alerts on her phone.</a:t>
             </a:r>
             <a:endParaRPr lang="en-US" sz="1300" dirty="0"/>
           </a:p>
@@ -2728,7 +2728,7 @@
                   <a:schemeClr val="bg1"/>
                 </a:solidFill>
               </a:rPr>
-              <a:t>Fake "Microsoft technician" who wants remote access</a:t>
+              <a:t>Pretends to be from Microsoft. Wants to control Mom's computer.</a:t>
             </a:r>
             <a:endParaRPr lang="en-US" sz="1300" dirty="0"/>
           </a:p>
@@ -2825,7 +2825,7 @@
                   <a:schemeClr val="bg1"/>
                 </a:solidFill>
               </a:rPr>
-              <a:t>Setup</a:t>
+              <a:t>Set up</a:t>
             </a:r>
             <a:endParaRPr lang="en-US" sz="1200" dirty="0"/>
           </a:p>
@@ -2945,7 +2945,7 @@
                   <a:schemeClr val="bg1"/>
                 </a:solidFill>
               </a:rPr>
-              <a:t>Fake popup</a:t>
+              <a:t>Fake warning</a:t>
             </a:r>
             <a:endParaRPr lang="en-US" sz="1200" dirty="0"/>
           </a:p>
@@ -3065,7 +3065,7 @@
                   <a:schemeClr val="bg1"/>
                 </a:solidFill>
               </a:rPr>
-              <a:t>AnyDesk</a:t>
+              <a:t>Scam app</a:t>
             </a:r>
             <a:endParaRPr lang="en-US" sz="1200" dirty="0"/>
           </a:p>
@@ -3425,7 +3425,7 @@
                   <a:schemeClr val="bg1"/>
                 </a:solidFill>
               </a:rPr>
-              <a:t>Dashboard</a:t>
+              <a:t>Scoreboard</a:t>
             </a:r>
             <a:endParaRPr lang="en-US" sz="1200" dirty="0"/>
           </a:p>
@@ -3545,7 +3545,7 @@
                   <a:schemeClr val="bg1"/>
                 </a:solidFill>
               </a:rPr>
-              <a:t>Tamper</a:t>
+              <a:t>Can't hide</a:t>
             </a:r>
             <a:endParaRPr lang="en-US" sz="1200" dirty="0"/>
           </a:p>
@@ -3714,7 +3714,7 @@
                   <a:schemeClr val="bg1"/>
                 </a:solidFill>
               </a:rPr>
-              <a:t>Sarah sets up HoldOn for Mom</a:t>
+              <a:t>Sarah turns on HoldOn for Mom</a:t>
             </a:r>
             <a:endParaRPr lang="en-US" sz="2800" dirty="0"/>
           </a:p>
@@ -3750,7 +3750,7 @@
                   <a:schemeClr val="accent3"/>
                 </a:solidFill>
               </a:rPr>
-              <a:t>SARAH · 2 MINUTES</a:t>
+              <a:t>TAKES 2 MINUTES</a:t>
             </a:r>
             <a:endParaRPr lang="en-US" sz="1200" dirty="0"/>
           </a:p>
@@ -3790,7 +3790,7 @@
                   <a:schemeClr val="bg1"/>
                 </a:solidFill>
               </a:rPr>
-              <a:t>Adds HoldOn to Mom's Chrome</a:t>
+              <a:t>Adds HoldOn to Mom's web browser</a:t>
             </a:r>
             <a:endParaRPr lang="en-US" sz="1400" dirty="0"/>
           </a:p>
@@ -3808,7 +3808,7 @@
                   <a:schemeClr val="bg1"/>
                 </a:solidFill>
               </a:rPr>
-              <a:t>Enters names, sees "Connected to Telegram"</a:t>
+              <a:t>Types in both their names</a:t>
             </a:r>
             <a:endParaRPr lang="en-US" sz="1400" dirty="0"/>
           </a:p>
@@ -3826,7 +3826,7 @@
                   <a:schemeClr val="bg1"/>
                 </a:solidFill>
               </a:rPr>
-              <a:t>Clicks Send test alert</a:t>
+              <a:t>Sends a test message to her own phone</a:t>
             </a:r>
             <a:endParaRPr lang="en-US" sz="1400" dirty="0"/>
           </a:p>
@@ -3889,7 +3889,7 @@
                   <a:schemeClr val="accent1"/>
                 </a:solidFill>
               </a:rPr>
-              <a:t>Phone: "HoldOn is now protecting Margaret."</a:t>
+              <a:t>Her phone says: "HoldOn is now protecting Margaret."</a:t>
             </a:r>
             <a:endParaRPr lang="en-US" sz="1400" dirty="0"/>
           </a:p>
@@ -4160,7 +4160,7 @@
                   <a:schemeClr val="bg1"/>
                 </a:solidFill>
               </a:rPr>
-              <a:t>A fake virus warning appears</a:t>
+              <a:t>A fake virus warning pops up</a:t>
             </a:r>
             <a:endParaRPr lang="en-US" sz="2800" dirty="0"/>
           </a:p>
@@ -4196,7 +4196,7 @@
                   <a:schemeClr val="accent3"/>
                 </a:solidFill>
               </a:rPr>
-              <a:t>MARGARET'S SCREEN</a:t>
+              <a:t>ON MOM'S SCREEN</a:t>
             </a:r>
             <a:endParaRPr lang="en-US" sz="1200" dirty="0"/>
           </a:p>
@@ -4236,7 +4236,7 @@
                   <a:schemeClr val="bg1"/>
                 </a:solidFill>
               </a:rPr>
-              <a:t>Scam page: "Your PC is infected. Call Microsoft."</a:t>
+              <a:t>A scary page says her computer has a virus and to call "Microsoft"</a:t>
             </a:r>
             <a:endParaRPr lang="en-US" sz="1400" dirty="0"/>
           </a:p>
@@ -4254,7 +4254,7 @@
                   <a:schemeClr val="bg1"/>
                 </a:solidFill>
               </a:rPr>
-              <a:t>HoldOn spots scam phrases + a toll-free number</a:t>
+              <a:t>HoldOn knows this trick and spots the fake</a:t>
             </a:r>
             <a:endParaRPr lang="en-US" sz="1400" dirty="0"/>
           </a:p>
@@ -4272,7 +4272,7 @@
                   <a:schemeClr val="bg1"/>
                 </a:solidFill>
               </a:rPr>
-              <a:t>Covers it: "This warning is FAKE. Do NOT call."</a:t>
+              <a:t>It covers the page: "This warning is FAKE. Do NOT call."</a:t>
             </a:r>
             <a:endParaRPr lang="en-US" sz="1400" dirty="0"/>
           </a:p>
@@ -4335,7 +4335,7 @@
                   <a:schemeClr val="accent2"/>
                 </a:solidFill>
               </a:rPr>
-              <a:t>Sarah gets alert #1, silently</a:t>
+              <a:t>Sarah's phone gets a quiet alert</a:t>
             </a:r>
             <a:endParaRPr lang="en-US" sz="1400" dirty="0"/>
           </a:p>
@@ -4555,7 +4555,7 @@
                   <a:schemeClr val="bg1"/>
                 </a:solidFill>
               </a:rPr>
-              <a:t>AnyDesk? HoldOn says STOP</a:t>
+              <a:t>"Install this app." HoldOn: STOP</a:t>
             </a:r>
             <a:endParaRPr lang="en-US" sz="2800" dirty="0"/>
           </a:p>
@@ -4591,7 +4591,7 @@
                   <a:schemeClr val="accent3"/>
                 </a:solidFill>
               </a:rPr>
-              <a:t>THE DANGER MOMENT</a:t>
+              <a:t>MOST DANGEROUS STEP</a:t>
             </a:r>
             <a:endParaRPr lang="en-US" sz="1200" dirty="0"/>
           </a:p>
@@ -4631,7 +4631,7 @@
                   <a:schemeClr val="bg1"/>
                 </a:solidFill>
               </a:rPr>
-              <a:t>Scammer asks her to install AnyDesk to control her screen</a:t>
+              <a:t>The scammer tells her to get AnyDesk, an app that lets him control her computer</a:t>
             </a:r>
             <a:endParaRPr lang="en-US" sz="1400" dirty="0"/>
           </a:p>
@@ -4649,7 +4649,7 @@
                   <a:schemeClr val="bg1"/>
                 </a:solidFill>
               </a:rPr>
-              <a:t>HoldOn recognises the site instantly</a:t>
+              <a:t>HoldOn knows this app and steps in right away</a:t>
             </a:r>
             <a:endParaRPr lang="en-US" sz="1400" dirty="0"/>
           </a:p>
@@ -4667,7 +4667,7 @@
                   <a:schemeClr val="bg1"/>
                 </a:solidFill>
               </a:rPr>
-              <a:t>Huge, elder-friendly STOP warning</a:t>
+              <a:t>A giant STOP sign she can't miss</a:t>
             </a:r>
             <a:endParaRPr lang="en-US" sz="1400" dirty="0"/>
           </a:p>
@@ -4730,7 +4730,7 @@
                   <a:schemeClr val="accent2"/>
                 </a:solidFill>
               </a:rPr>
-              <a:t>"Sarah has been notified and will call you."</a:t>
+              <a:t>"Sarah knows. She will call you."</a:t>
             </a:r>
             <a:endParaRPr lang="en-US" sz="1400" dirty="0"/>
           </a:p>
@@ -4986,7 +4986,7 @@
                   <a:schemeClr val="accent3"/>
                 </a:solidFill>
               </a:rPr>
-              <a:t>SARAH'S PHONE</a:t>
+              <a:t>ON SARAH'S PHONE</a:t>
             </a:r>
             <a:endParaRPr lang="en-US" sz="1200" dirty="0"/>
           </a:p>
@@ -5026,7 +5026,7 @@
                   <a:schemeClr val="bg1"/>
                 </a:solidFill>
               </a:rPr>
-              <a:t>AI writes the alert from context: popup, then AnyDesk</a:t>
+              <a:t>AI explains what happened, in plain words</a:t>
             </a:r>
             <a:endParaRPr lang="en-US" sz="1400" dirty="0"/>
           </a:p>
@@ -5044,7 +5044,7 @@
                   <a:schemeClr val="bg1"/>
                 </a:solidFill>
               </a:rPr>
-              <a:t>Tells Sarah what to do when she calls</a:t>
+              <a:t>It tells Sarah exactly what to do</a:t>
             </a:r>
             <a:endParaRPr lang="en-US" sz="1400" dirty="0"/>
           </a:p>
@@ -5062,7 +5062,7 @@
                   <a:schemeClr val="bg1"/>
                 </a:solidFill>
               </a:rPr>
-              <a:t>On Telegram: a channel the scammer can't see</a:t>
+              <a:t>The scammer can't see this message</a:t>
             </a:r>
             <a:endParaRPr lang="en-US" sz="1400" dirty="0"/>
           </a:p>
@@ -5125,7 +5125,7 @@
                   <a:schemeClr val="accent1"/>
                 </a:solidFill>
               </a:rPr>
-              <a:t>Help arrives from outside the scam</a:t>
+              <a:t>Help comes from outside the scam</a:t>
             </a:r>
             <a:endParaRPr lang="en-US" sz="1400" dirty="0"/>
           </a:p>
@@ -5421,7 +5421,7 @@
                   <a:schemeClr val="bg1"/>
                 </a:solidFill>
               </a:rPr>
-              <a:t>Sarah calls Margaret and breaks the isolation</a:t>
+              <a:t>Sarah calls Mom and tells her to hang up</a:t>
             </a:r>
             <a:endParaRPr lang="en-US" sz="1400" dirty="0"/>
           </a:p>
@@ -5439,7 +5439,7 @@
                   <a:schemeClr val="bg1"/>
                 </a:solidFill>
               </a:rPr>
-              <a:t>Taps "It was a scam — I stopped it"</a:t>
+              <a:t>She taps "It was a scam — I stopped it"</a:t>
             </a:r>
             <a:endParaRPr lang="en-US" sz="1400" dirty="0"/>
           </a:p>
@@ -5457,7 +5457,7 @@
                   <a:schemeClr val="bg1"/>
                 </a:solidFill>
               </a:rPr>
-              <a:t>The alert updates: "Logged: scam stopped"</a:t>
+              <a:t>HoldOn saves the result: scam stopped</a:t>
             </a:r>
             <a:endParaRPr lang="en-US" sz="1400" dirty="0"/>
           </a:p>
@@ -5520,7 +5520,7 @@
                   <a:schemeClr val="accent1"/>
                 </a:solidFill>
               </a:rPr>
-              <a:t>Every alert measures its own impact</a:t>
+              <a:t>Every alert tells us if HoldOn helped</a:t>
             </a:r>
             <a:endParaRPr lang="en-US" sz="1400" dirty="0"/>
           </a:p>
@@ -5740,7 +5740,7 @@
                   <a:schemeClr val="bg1"/>
                 </a:solidFill>
               </a:rPr>
-              <a:t>Impact, measured from day one</a:t>
+              <a:t>We count every save</a:t>
             </a:r>
             <a:endParaRPr lang="en-US" sz="2800" dirty="0"/>
           </a:p>
@@ -5776,7 +5776,7 @@
                   <a:schemeClr val="accent3"/>
                 </a:solidFill>
               </a:rPr>
-              <a:t>ANSWERED IN TELEGRAM</a:t>
+              <a:t>SARAH'S ANSWERS</a:t>
             </a:r>
             <a:endParaRPr lang="en-US" sz="1100" dirty="0"/>
           </a:p>
@@ -5863,7 +5863,7 @@
                   <a:schemeClr val="accent3"/>
                 </a:solidFill>
               </a:rPr>
-              <a:t>ROLLED UP ON SARAH'S DASHBOARD</a:t>
+              <a:t>THE SCOREBOARD</a:t>
             </a:r>
             <a:endParaRPr lang="en-US" sz="1100" dirty="0"/>
           </a:p>
@@ -5954,7 +5954,25 @@
                   <a:schemeClr val="bg1"/>
                 </a:solidFill>
               </a:rPr>
-              <a:t>Scams stopped, false alarms and precision, counted live</a:t>
+              <a:t>Counts scams stopped and false alarms (alerts that weren't real scams)</a:t>
+            </a:r>
+            <a:endParaRPr lang="en-US" sz="1400" dirty="0"/>
+          </a:p>
+          <a:p>
+            <a:pPr marL="190500" indent="-190500">
+              <a:spcAft>
+                <a:spcPts val="600"/>
+              </a:spcAft>
+              <a:buSzPct val="100000"/>
+              <a:buChar char="•"/>
+            </a:pPr>
+            <a:r>
+              <a:rPr lang="en-US" sz="1400" dirty="0">
+                <a:solidFill>
+                  <a:schemeClr val="bg1"/>
+                </a:solidFill>
+              </a:rPr>
+              <a:t>Precision = how often an alert was a real scam</a:t>
             </a:r>
             <a:endParaRPr lang="en-US" sz="1400" dirty="0"/>
           </a:p>
@@ -5969,7 +5987,7 @@
                   <a:schemeClr val="bg1"/>
                 </a:solidFill>
               </a:rPr>
-              <a:t>Real counts from our test runs today: false alarms were triggered on purpose to tune detection</a:t>
+              <a:t>Real numbers from our tests today. Some false alarms were on purpose</a:t>
             </a:r>
             <a:endParaRPr lang="en-US" sz="1400" dirty="0"/>
           </a:p>
@@ -6138,7 +6156,7 @@
                   <a:schemeClr val="bg1"/>
                 </a:solidFill>
               </a:rPr>
-              <a:t>Scammer: "Remove HoldOn"</a:t>
+              <a:t>Scammer: "Delete HoldOn"</a:t>
             </a:r>
             <a:endParaRPr lang="en-US" sz="2800" dirty="0"/>
           </a:p>
@@ -6174,7 +6192,7 @@
                   <a:schemeClr val="accent3"/>
                 </a:solidFill>
               </a:rPr>
-              <a:t>TAMPER-PROOF</a:t>
+              <a:t>CAN'T BE SECRETLY REMOVED</a:t>
             </a:r>
             <a:endParaRPr lang="en-US" sz="1200" dirty="0"/>
           </a:p>
@@ -6214,7 +6232,7 @@
                   <a:schemeClr val="bg1"/>
                 </a:solidFill>
               </a:rPr>
-              <a:t>Scammers often make victims remove protection</a:t>
+              <a:t>Scammers often tell people to delete safety apps</a:t>
             </a:r>
             <a:endParaRPr lang="en-US" sz="1400" dirty="0"/>
           </a:p>
@@ -6232,7 +6250,7 @@
                   <a:schemeClr val="bg1"/>
                 </a:solidFill>
               </a:rPr>
-              <a:t>Removing HoldOn triggers one last alert</a:t>
+              <a:t>If HoldOn is removed, it sends one last alert</a:t>
             </a:r>
             <a:endParaRPr lang="en-US" sz="1400" dirty="0"/>
           </a:p>
@@ -6250,7 +6268,7 @@
                   <a:schemeClr val="bg1"/>
                 </a:solidFill>
               </a:rPr>
-              <a:t>Family knows, even after it's gone</a:t>
+              <a:t>So Sarah still finds out</a:t>
             </a:r>
             <a:endParaRPr lang="en-US" sz="1400" dirty="0"/>
           </a:p>
@@ -6313,7 +6331,7 @@
                   <a:schemeClr val="accent3"/>
                 </a:solidFill>
               </a:rPr>
-              <a:t>Removing HoldOn alerts Sarah too</a:t>
+              <a:t>Deleting HoldOn alerts Sarah too</a:t>
             </a:r>
             <a:endParaRPr lang="en-US" sz="1400" dirty="0"/>
           </a:p>
@@ -6412,7 +6430,7 @@
                   <a:schemeClr val="bg2"/>
                 </a:solidFill>
               </a:rPr>
-              <a:t>Exact alert text sent to Sarah's Telegram</a:t>
+              <a:t>The real message Sarah gets on her phone</a:t>
             </a:r>
             <a:endParaRPr lang="en-US" sz="1200" dirty="0"/>
           </a:p>
